--- a/example/assets/samples/deck.pptx
+++ b/example/assets/samples/deck.pptx
@@ -194,7 +194,7 @@
         <p:txBody>
           <a:p>
             <a:r>
-              <a:t>open_reader_kit</a:t>
+              <a:t>universal_document_viewer</a:t>
             </a:r>
           </a:p>
         </p:txBody>
